--- a/m9/diapositivos/sessao-01-m9-f01.pptx
+++ b/m9/diapositivos/sessao-01-m9-f01.pptx
@@ -4050,9 +4050,34 @@
           </a:p>
         </p:txBody>
       </p:sp>
-      <p:sp>
-        <p:nvSpPr>
-          <p:cNvPr id="6" name="Shape 3"/>
+      <p:pic>
+        <p:nvPicPr>
+          <p:cNvPr id="6" name="Image 0" descr="/home/user/epi-portugues-fontes/_interno/biblioteca-imagens/fontes/mafra-palacio-convento.jpg">    </p:cNvPr>
+          <p:cNvPicPr>
+            <a:picLocks noChangeAspect="1"/>
+          </p:cNvPicPr>
+          <p:nvPr/>
+        </p:nvPicPr>
+        <p:blipFill>
+          <a:blip r:embed="rId1">
+            <a:alphaModFix amt="8000"/>
+          </a:blip>
+          <a:srcRect l="0" r="0" t="0" b="0"/>
+          <a:stretch/>
+        </p:blipFill>
+        <p:spPr>
+          <a:xfrm>
+            <a:off x="0" y="0"/>
+            <a:ext cx="12191695" cy="6858000"/>
+          </a:xfrm>
+          <a:prstGeom prst="rect">
+            <a:avLst/>
+          </a:prstGeom>
+        </p:spPr>
+      </p:pic>
+      <p:sp>
+        <p:nvSpPr>
+          <p:cNvPr id="7" name="Shape 3"/>
           <p:cNvSpPr/>
           <p:nvPr/>
         </p:nvSpPr>
@@ -4074,7 +4099,7 @@
       </p:sp>
       <p:sp>
         <p:nvSpPr>
-          <p:cNvPr id="7" name="Text 4"/>
+          <p:cNvPr id="8" name="Text 4"/>
           <p:cNvSpPr/>
           <p:nvPr/>
         </p:nvSpPr>
@@ -4105,7 +4130,7 @@
                 <a:ea typeface="Arial" pitchFamily="34" charset="-122"/>
                 <a:cs typeface="Arial" pitchFamily="34" charset="-120"/>
               </a:rPr>
-              <a:t>LER, NA FOLHA</a:t>
+              <a:t>LER: O REI MARCA A DATA (CAPÍTULO XXI) (1 DE 2)</a:t>
             </a:r>
             <a:endParaRPr lang="en-US" sz="1100" dirty="0"/>
           </a:p>
@@ -4113,80 +4138,14 @@
       </p:sp>
       <p:sp>
         <p:nvSpPr>
-          <p:cNvPr id="8" name="Text 5"/>
-          <p:cNvSpPr/>
-          <p:nvPr/>
-        </p:nvSpPr>
-        <p:spPr>
-          <a:xfrm>
-            <a:off x="822960" y="868680"/>
-            <a:ext cx="9814255" cy="822960"/>
-          </a:xfrm>
-          <a:prstGeom prst="rect">
-            <a:avLst/>
-          </a:prstGeom>
-          <a:noFill/>
-          <a:ln/>
-        </p:spPr>
-        <p:txBody>
-          <a:bodyPr wrap="square" lIns="0" tIns="0" rIns="0" bIns="0" rtlCol="0" anchor="b">
-            <a:normAutofit/>
-          </a:bodyPr>
-          <a:lstStyle/>
-          <a:p>
-            <a:pPr indent="0" marL="0">
-              <a:buNone/>
-            </a:pPr>
-            <a:r>
-              <a:rPr lang="en-US" sz="3400" dirty="0">
-                <a:solidFill>
-                  <a:srgbClr val="F2F0EA"/>
-                </a:solidFill>
-                <a:latin typeface="Arial" pitchFamily="34" charset="0"/>
-                <a:ea typeface="Arial" pitchFamily="34" charset="-122"/>
-                <a:cs typeface="Arial" pitchFamily="34" charset="-120"/>
-              </a:rPr>
-              <a:t>O texto lê-se na folha</a:t>
-            </a:r>
-            <a:endParaRPr lang="en-US" sz="3400" dirty="0"/>
-          </a:p>
-        </p:txBody>
-      </p:sp>
-      <p:sp>
-        <p:nvSpPr>
-          <p:cNvPr id="9" name="Shape 6"/>
-          <p:cNvSpPr/>
-          <p:nvPr/>
-        </p:nvSpPr>
-        <p:spPr>
-          <a:xfrm>
-            <a:off x="822960" y="1746504"/>
-            <a:ext cx="640080" cy="64008"/>
-          </a:xfrm>
-          <a:prstGeom prst="rect">
-            <a:avLst/>
-          </a:prstGeom>
-          <a:solidFill>
-            <a:srgbClr val="E4555C"/>
-          </a:solidFill>
-          <a:ln w="12700">
-            <a:solidFill>
-              <a:srgbClr val="E4555C"/>
-            </a:solidFill>
-            <a:prstDash val="solid"/>
-          </a:ln>
-        </p:spPr>
-      </p:sp>
-      <p:sp>
-        <p:nvSpPr>
-          <p:cNvPr id="10" name="Text 7"/>
-          <p:cNvSpPr/>
-          <p:nvPr/>
-        </p:nvSpPr>
-        <p:spPr>
-          <a:xfrm>
-            <a:off x="822960" y="2057400"/>
-            <a:ext cx="9814255" cy="4023360"/>
+          <p:cNvPr id="9" name="Text 5"/>
+          <p:cNvSpPr/>
+          <p:nvPr/>
+        </p:nvSpPr>
+        <p:spPr>
+          <a:xfrm>
+            <a:off x="822960" y="1005840"/>
+            <a:ext cx="9814255" cy="4937760"/>
           </a:xfrm>
           <a:prstGeom prst="rect">
             <a:avLst/>
@@ -4202,11 +4161,8 @@
           <a:p>
             <a:pPr indent="0" marL="0">
               <a:lnSpc>
-                <a:spcPct val="110000"/>
+                <a:spcPct val="125000"/>
               </a:lnSpc>
-              <a:spcAft>
-                <a:spcPts val="1400"/>
-              </a:spcAft>
               <a:buNone/>
             </a:pPr>
             <a:r>
@@ -4218,32 +4174,50 @@
                 <a:ea typeface="Georgia" pitchFamily="34" charset="-122"/>
                 <a:cs typeface="Georgia" pitchFamily="34" charset="-120"/>
               </a:rPr>
-              <a:t>O rei marca a data (capítulo XXI)</a:t>
+              <a:t>Desta meditação e agonia não saiu el-rei para vestir o burel da penitência e da renúncia, mas para fazer voltar os camaristas, os secretários e os frades, a cantarina viria mais tarde, a estes perguntando se era realmente verdade, consoante julgava saber, que a sagração das basílicas se deve fazer aos domingos, e eles responderam que sim, segundo o Ritual, e então el-rei mandou apurar quando cairia o dia do seu aniversário, vinte e dois de Outubro, a um domingo, tendo os secretários respondido, após cuidadosa verificação do calendário, que tal coincidência se daria daí a dois anos, em mil setecentos e trinta, Então é nesse dia que se fará a sagração da basílica de Mafra, assim o quero, ordeno e determino, e quando isto ouviram foram os camaristas beijar a mão do seu senhor, vós me direis qual é mais excelente, se ser do mundo rei, se desta gente.</a:t>
             </a:r>
             <a:endParaRPr lang="en-US" sz="2200" dirty="0"/>
           </a:p>
+        </p:txBody>
+      </p:sp>
+      <p:sp>
+        <p:nvSpPr>
+          <p:cNvPr id="10" name="Text 6"/>
+          <p:cNvSpPr/>
+          <p:nvPr/>
+        </p:nvSpPr>
+        <p:spPr>
+          <a:xfrm>
+            <a:off x="822960" y="6035040"/>
+            <a:ext cx="9814255" cy="292608"/>
+          </a:xfrm>
+          <a:prstGeom prst="rect">
+            <a:avLst/>
+          </a:prstGeom>
+          <a:noFill/>
+          <a:ln/>
+        </p:spPr>
+        <p:txBody>
+          <a:bodyPr wrap="square" lIns="0" tIns="0" rIns="0" bIns="0" rtlCol="0" anchor="ctr">
+            <a:normAutofit/>
+          </a:bodyPr>
+          <a:lstStyle/>
           <a:p>
             <a:pPr indent="0" marL="0">
-              <a:lnSpc>
-                <a:spcPct val="110000"/>
-              </a:lnSpc>
-              <a:spcAft>
-                <a:spcPts val="1400"/>
-              </a:spcAft>
-              <a:buNone/>
-            </a:pPr>
-            <a:r>
-              <a:rPr lang="en-US" sz="2200" dirty="0">
-                <a:solidFill>
-                  <a:srgbClr val="F2F0EA"/>
-                </a:solidFill>
-                <a:latin typeface="Georgia" pitchFamily="34" charset="0"/>
-                <a:ea typeface="Georgia" pitchFamily="34" charset="-122"/>
-                <a:cs typeface="Georgia" pitchFamily="34" charset="-120"/>
-              </a:rPr>
-              <a:t>José Saramago, Memorial do Convento (1982), capítulo XXI. Texto junto pelo docente; grafia da edição.</a:t>
-            </a:r>
-            <a:endParaRPr lang="en-US" sz="2200" dirty="0"/>
+              <a:buNone/>
+            </a:pPr>
+            <a:r>
+              <a:rPr lang="en-US" sz="1200" dirty="0">
+                <a:solidFill>
+                  <a:srgbClr val="A9A79F"/>
+                </a:solidFill>
+                <a:latin typeface="Arial" pitchFamily="34" charset="0"/>
+                <a:ea typeface="Arial" pitchFamily="34" charset="-122"/>
+                <a:cs typeface="Arial" pitchFamily="34" charset="-120"/>
+              </a:rPr>
+              <a:t>José Saramago, Memorial do Convento (1982), capítulo XXI. grafia da edição. Excerto para estudo.</a:t>
+            </a:r>
+            <a:endParaRPr lang="en-US" sz="1200" dirty="0"/>
           </a:p>
         </p:txBody>
       </p:sp>
@@ -4396,9 +4370,34 @@
           </a:p>
         </p:txBody>
       </p:sp>
-      <p:sp>
-        <p:nvSpPr>
-          <p:cNvPr id="6" name="Shape 3"/>
+      <p:pic>
+        <p:nvPicPr>
+          <p:cNvPr id="6" name="Image 0" descr="/home/user/epi-portugues-fontes/_interno/biblioteca-imagens/fontes/mafra-palacio-convento.jpg">    </p:cNvPr>
+          <p:cNvPicPr>
+            <a:picLocks noChangeAspect="1"/>
+          </p:cNvPicPr>
+          <p:nvPr/>
+        </p:nvPicPr>
+        <p:blipFill>
+          <a:blip r:embed="rId1">
+            <a:alphaModFix amt="8000"/>
+          </a:blip>
+          <a:srcRect l="0" r="0" t="0" b="0"/>
+          <a:stretch/>
+        </p:blipFill>
+        <p:spPr>
+          <a:xfrm>
+            <a:off x="0" y="0"/>
+            <a:ext cx="12191695" cy="6858000"/>
+          </a:xfrm>
+          <a:prstGeom prst="rect">
+            <a:avLst/>
+          </a:prstGeom>
+        </p:spPr>
+      </p:pic>
+      <p:sp>
+        <p:nvSpPr>
+          <p:cNvPr id="7" name="Shape 3"/>
           <p:cNvSpPr/>
           <p:nvPr/>
         </p:nvSpPr>
@@ -4420,7 +4419,7 @@
       </p:sp>
       <p:sp>
         <p:nvSpPr>
-          <p:cNvPr id="7" name="Text 4"/>
+          <p:cNvPr id="8" name="Text 4"/>
           <p:cNvSpPr/>
           <p:nvPr/>
         </p:nvSpPr>
@@ -4451,7 +4450,7 @@
                 <a:ea typeface="Arial" pitchFamily="34" charset="-122"/>
                 <a:cs typeface="Arial" pitchFamily="34" charset="-120"/>
               </a:rPr>
-              <a:t>O ESSENCIAL</a:t>
+              <a:t>LER: O REI MARCA A DATA (CAPÍTULO XXI) (2 DE 2)</a:t>
             </a:r>
             <a:endParaRPr lang="en-US" sz="1100" dirty="0"/>
           </a:p>
@@ -4459,167 +4458,14 @@
       </p:sp>
       <p:sp>
         <p:nvSpPr>
-          <p:cNvPr id="8" name="Text 5"/>
-          <p:cNvSpPr/>
-          <p:nvPr/>
-        </p:nvSpPr>
-        <p:spPr>
-          <a:xfrm>
-            <a:off x="822960" y="868680"/>
-            <a:ext cx="9814255" cy="822960"/>
-          </a:xfrm>
-          <a:prstGeom prst="rect">
-            <a:avLst/>
-          </a:prstGeom>
-          <a:noFill/>
-          <a:ln/>
-        </p:spPr>
-        <p:txBody>
-          <a:bodyPr wrap="square" lIns="0" tIns="0" rIns="0" bIns="0" rtlCol="0" anchor="b">
-            <a:normAutofit/>
-          </a:bodyPr>
-          <a:lstStyle/>
-          <a:p>
-            <a:pPr indent="0" marL="0">
-              <a:buNone/>
-            </a:pPr>
-            <a:r>
-              <a:rPr lang="en-US" sz="3400" dirty="0">
-                <a:solidFill>
-                  <a:srgbClr val="F2F0EA"/>
-                </a:solidFill>
-                <a:latin typeface="Arial" pitchFamily="34" charset="0"/>
-                <a:ea typeface="Arial" pitchFamily="34" charset="-122"/>
-                <a:cs typeface="Arial" pitchFamily="34" charset="-120"/>
-              </a:rPr>
-              <a:t>Três coisas a fixar</a:t>
-            </a:r>
-            <a:endParaRPr lang="en-US" sz="3400" dirty="0"/>
-          </a:p>
-        </p:txBody>
-      </p:sp>
-      <p:sp>
-        <p:nvSpPr>
-          <p:cNvPr id="9" name="Shape 6"/>
-          <p:cNvSpPr/>
-          <p:nvPr/>
-        </p:nvSpPr>
-        <p:spPr>
-          <a:xfrm>
-            <a:off x="822960" y="1746504"/>
-            <a:ext cx="640080" cy="64008"/>
-          </a:xfrm>
-          <a:prstGeom prst="rect">
-            <a:avLst/>
-          </a:prstGeom>
-          <a:solidFill>
-            <a:srgbClr val="E4555C"/>
-          </a:solidFill>
-          <a:ln w="12700">
-            <a:solidFill>
-              <a:srgbClr val="E4555C"/>
-            </a:solidFill>
-            <a:prstDash val="solid"/>
-          </a:ln>
-        </p:spPr>
-      </p:sp>
-      <p:sp>
-        <p:nvSpPr>
-          <p:cNvPr id="10" name="Shape 7"/>
-          <p:cNvSpPr/>
-          <p:nvPr/>
-        </p:nvSpPr>
-        <p:spPr>
-          <a:xfrm>
-            <a:off x="1005840" y="2286000"/>
-            <a:ext cx="0" cy="2788412"/>
-          </a:xfrm>
-          <a:prstGeom prst="line">
-            <a:avLst/>
-          </a:prstGeom>
-          <a:noFill/>
-          <a:ln w="12700">
-            <a:solidFill>
-              <a:srgbClr val="A9A79F"/>
-            </a:solidFill>
-            <a:prstDash val="solid"/>
-          </a:ln>
-        </p:spPr>
-      </p:sp>
-      <p:sp>
-        <p:nvSpPr>
-          <p:cNvPr id="11" name="Shape 8"/>
-          <p:cNvSpPr/>
-          <p:nvPr/>
-        </p:nvSpPr>
-        <p:spPr>
-          <a:xfrm>
-            <a:off x="822960" y="2103120"/>
-            <a:ext cx="365760" cy="365760"/>
-          </a:xfrm>
-          <a:prstGeom prst="ellipse">
-            <a:avLst/>
-          </a:prstGeom>
-          <a:solidFill>
-            <a:srgbClr val="111111"/>
-          </a:solidFill>
-          <a:ln w="15875">
-            <a:solidFill>
-              <a:srgbClr val="F2F0EA"/>
-            </a:solidFill>
-            <a:prstDash val="solid"/>
-          </a:ln>
-        </p:spPr>
-      </p:sp>
-      <p:sp>
-        <p:nvSpPr>
-          <p:cNvPr id="12" name="Text 9"/>
-          <p:cNvSpPr/>
-          <p:nvPr/>
-        </p:nvSpPr>
-        <p:spPr>
-          <a:xfrm>
-            <a:off x="822960" y="2103120"/>
-            <a:ext cx="365760" cy="365760"/>
-          </a:xfrm>
-          <a:prstGeom prst="rect">
-            <a:avLst/>
-          </a:prstGeom>
-          <a:noFill/>
-          <a:ln/>
-        </p:spPr>
-        <p:txBody>
-          <a:bodyPr wrap="square" lIns="0" tIns="0" rIns="0" bIns="0" rtlCol="0" anchor="ctr"/>
-          <a:lstStyle/>
-          <a:p>
-            <a:pPr algn="ctr" indent="0" marL="0">
-              <a:buNone/>
-            </a:pPr>
-            <a:r>
-              <a:rPr lang="en-US" sz="1300" b="1" dirty="0">
-                <a:solidFill>
-                  <a:srgbClr val="F2F0EA"/>
-                </a:solidFill>
-                <a:latin typeface="Arial" pitchFamily="34" charset="0"/>
-                <a:ea typeface="Arial" pitchFamily="34" charset="-122"/>
-                <a:cs typeface="Arial" pitchFamily="34" charset="-120"/>
-              </a:rPr>
-              <a:t>1</a:t>
-            </a:r>
-            <a:endParaRPr lang="en-US" sz="1300" dirty="0"/>
-          </a:p>
-        </p:txBody>
-      </p:sp>
-      <p:sp>
-        <p:nvSpPr>
-          <p:cNvPr id="13" name="Text 10"/>
-          <p:cNvSpPr/>
-          <p:nvPr/>
-        </p:nvSpPr>
-        <p:spPr>
-          <a:xfrm>
-            <a:off x="1417320" y="2112264"/>
-            <a:ext cx="9174175" cy="1223772"/>
+          <p:cNvPr id="9" name="Text 5"/>
+          <p:cNvSpPr/>
+          <p:nvPr/>
+        </p:nvSpPr>
+        <p:spPr>
+          <a:xfrm>
+            <a:off x="822960" y="1005840"/>
+            <a:ext cx="9814255" cy="4937760"/>
           </a:xfrm>
           <a:prstGeom prst="rect">
             <a:avLst/>
@@ -4635,7 +4481,7 @@
           <a:p>
             <a:pPr indent="0" marL="0">
               <a:lnSpc>
-                <a:spcPct val="105000"/>
+                <a:spcPct val="125000"/>
               </a:lnSpc>
               <a:buNone/>
             </a:pPr>
@@ -4644,229 +4490,74 @@
                 <a:solidFill>
                   <a:srgbClr val="F2F0EA"/>
                 </a:solidFill>
-                <a:latin typeface="Arial" pitchFamily="34" charset="0"/>
-                <a:ea typeface="Arial" pitchFamily="34" charset="-122"/>
-                <a:cs typeface="Arial" pitchFamily="34" charset="-120"/>
-              </a:rPr>
-              <a:t>Memorial do Convento, publicado em outubro de 1982, passa-se no início do século XVIII, no reinado de D. João V e no tempo da Inquisição.</a:t>
+                <a:latin typeface="Georgia" pitchFamily="34" charset="0"/>
+                <a:ea typeface="Georgia" pitchFamily="34" charset="-122"/>
+                <a:cs typeface="Georgia" pitchFamily="34" charset="-120"/>
+              </a:rPr>
+              <a:t>Deitaram reverentemente alguma água na fervura João Frederico Ludovice e o doutor Leandro de Melo, chamados à pressa de Mafra, aonde o primeiro tinha ido e onde o segundo assistia, os quais, com a memória fresca do que lá viam, disseram que o estado da obra não consentia tão feliz previsão, tanto no que tocava ao convento, cujo segundo corpo se ia levantando lentamente de paredes, como à igreja, por sua natureza de delicada construção, um assembramento de pedras que não poderia ser feito à ligeira, vossa majestade o sabe melhor que ninguém, se tão harmoniosamente concilia e equilibra as partes de que se forma a nação.</a:t>
             </a:r>
             <a:endParaRPr lang="en-US" sz="2200" dirty="0"/>
           </a:p>
-        </p:txBody>
-      </p:sp>
-      <p:sp>
-        <p:nvSpPr>
-          <p:cNvPr id="14" name="Shape 11"/>
-          <p:cNvSpPr/>
-          <p:nvPr/>
-        </p:nvSpPr>
-        <p:spPr>
-          <a:xfrm>
-            <a:off x="822960" y="3326892"/>
-            <a:ext cx="365760" cy="365760"/>
-          </a:xfrm>
-          <a:prstGeom prst="ellipse">
-            <a:avLst/>
-          </a:prstGeom>
-          <a:solidFill>
-            <a:srgbClr val="111111"/>
-          </a:solidFill>
-          <a:ln w="15875">
-            <a:solidFill>
-              <a:srgbClr val="F2F0EA"/>
-            </a:solidFill>
-            <a:prstDash val="solid"/>
-          </a:ln>
-        </p:spPr>
-      </p:sp>
-      <p:sp>
-        <p:nvSpPr>
-          <p:cNvPr id="15" name="Text 12"/>
-          <p:cNvSpPr/>
-          <p:nvPr/>
-        </p:nvSpPr>
-        <p:spPr>
-          <a:xfrm>
-            <a:off x="822960" y="3326892"/>
-            <a:ext cx="365760" cy="365760"/>
-          </a:xfrm>
-          <a:prstGeom prst="rect">
-            <a:avLst/>
-          </a:prstGeom>
-          <a:noFill/>
-          <a:ln/>
-        </p:spPr>
-        <p:txBody>
-          <a:bodyPr wrap="square" lIns="0" tIns="0" rIns="0" bIns="0" rtlCol="0" anchor="ctr"/>
-          <a:lstStyle/>
-          <a:p>
-            <a:pPr algn="ctr" indent="0" marL="0">
-              <a:buNone/>
-            </a:pPr>
-            <a:r>
-              <a:rPr lang="en-US" sz="1300" b="1" dirty="0">
+          <a:p>
+            <a:pPr indent="0" marL="0">
+              <a:lnSpc>
+                <a:spcPct val="125000"/>
+              </a:lnSpc>
+              <a:buNone/>
+            </a:pPr>
+            <a:r>
+              <a:rPr lang="en-US" sz="2200" dirty="0">
                 <a:solidFill>
                   <a:srgbClr val="F2F0EA"/>
                 </a:solidFill>
-                <a:latin typeface="Arial" pitchFamily="34" charset="0"/>
-                <a:ea typeface="Arial" pitchFamily="34" charset="-122"/>
-                <a:cs typeface="Arial" pitchFamily="34" charset="-120"/>
-              </a:rPr>
-              <a:t>2</a:t>
-            </a:r>
-            <a:endParaRPr lang="en-US" sz="1300" dirty="0"/>
-          </a:p>
-        </p:txBody>
-      </p:sp>
-      <p:sp>
-        <p:nvSpPr>
-          <p:cNvPr id="16" name="Text 13"/>
-          <p:cNvSpPr/>
-          <p:nvPr/>
-        </p:nvSpPr>
-        <p:spPr>
-          <a:xfrm>
-            <a:off x="1417320" y="3336036"/>
-            <a:ext cx="9174175" cy="1564640"/>
-          </a:xfrm>
-          <a:prstGeom prst="rect">
-            <a:avLst/>
-          </a:prstGeom>
-          <a:noFill/>
-          <a:ln/>
-        </p:spPr>
-        <p:txBody>
-          <a:bodyPr wrap="square" lIns="0" tIns="0" rIns="0" bIns="0" rtlCol="0" anchor="t">
+                <a:latin typeface="Georgia" pitchFamily="34" charset="0"/>
+                <a:ea typeface="Georgia" pitchFamily="34" charset="-122"/>
+                <a:cs typeface="Georgia" pitchFamily="34" charset="-120"/>
+              </a:rPr>
+              <a:t>[…]</a:t>
+            </a:r>
+            <a:endParaRPr lang="en-US" sz="2200" dirty="0"/>
+          </a:p>
+        </p:txBody>
+      </p:sp>
+      <p:sp>
+        <p:nvSpPr>
+          <p:cNvPr id="10" name="Text 6"/>
+          <p:cNvSpPr/>
+          <p:nvPr/>
+        </p:nvSpPr>
+        <p:spPr>
+          <a:xfrm>
+            <a:off x="822960" y="6035040"/>
+            <a:ext cx="9814255" cy="292608"/>
+          </a:xfrm>
+          <a:prstGeom prst="rect">
+            <a:avLst/>
+          </a:prstGeom>
+          <a:noFill/>
+          <a:ln/>
+        </p:spPr>
+        <p:txBody>
+          <a:bodyPr wrap="square" lIns="0" tIns="0" rIns="0" bIns="0" rtlCol="0" anchor="ctr">
             <a:normAutofit/>
           </a:bodyPr>
           <a:lstStyle/>
           <a:p>
             <a:pPr indent="0" marL="0">
-              <a:lnSpc>
-                <a:spcPct val="105000"/>
-              </a:lnSpc>
-              <a:buNone/>
-            </a:pPr>
-            <a:r>
-              <a:rPr lang="en-US" sz="2200" dirty="0">
-                <a:solidFill>
-                  <a:srgbClr val="F2F0EA"/>
-                </a:solidFill>
-                <a:latin typeface="Arial" pitchFamily="34" charset="0"/>
-                <a:ea typeface="Arial" pitchFamily="34" charset="-122"/>
-                <a:cs typeface="Arial" pitchFamily="34" charset="-120"/>
-              </a:rPr>
-              <a:t>O romance cruza história e ficção em quatro linhas de ação (a construção do convento; a passarola; o amor de Baltasar e Blimunda; a corte e a Inquisição) e critica a exploração dos pobres.</a:t>
-            </a:r>
-            <a:endParaRPr lang="en-US" sz="2200" dirty="0"/>
-          </a:p>
-        </p:txBody>
-      </p:sp>
-      <p:sp>
-        <p:nvSpPr>
-          <p:cNvPr id="17" name="Shape 14"/>
-          <p:cNvSpPr/>
-          <p:nvPr/>
-        </p:nvSpPr>
-        <p:spPr>
-          <a:xfrm>
-            <a:off x="822960" y="4891532"/>
-            <a:ext cx="365760" cy="365760"/>
-          </a:xfrm>
-          <a:prstGeom prst="ellipse">
-            <a:avLst/>
-          </a:prstGeom>
-          <a:solidFill>
-            <a:srgbClr val="111111"/>
-          </a:solidFill>
-          <a:ln w="15875">
-            <a:solidFill>
-              <a:srgbClr val="F2F0EA"/>
-            </a:solidFill>
-            <a:prstDash val="solid"/>
-          </a:ln>
-        </p:spPr>
-      </p:sp>
-      <p:sp>
-        <p:nvSpPr>
-          <p:cNvPr id="18" name="Text 15"/>
-          <p:cNvSpPr/>
-          <p:nvPr/>
-        </p:nvSpPr>
-        <p:spPr>
-          <a:xfrm>
-            <a:off x="822960" y="4891532"/>
-            <a:ext cx="365760" cy="365760"/>
-          </a:xfrm>
-          <a:prstGeom prst="rect">
-            <a:avLst/>
-          </a:prstGeom>
-          <a:noFill/>
-          <a:ln/>
-        </p:spPr>
-        <p:txBody>
-          <a:bodyPr wrap="square" lIns="0" tIns="0" rIns="0" bIns="0" rtlCol="0" anchor="ctr"/>
-          <a:lstStyle/>
-          <a:p>
-            <a:pPr algn="ctr" indent="0" marL="0">
-              <a:buNone/>
-            </a:pPr>
-            <a:r>
-              <a:rPr lang="en-US" sz="1300" b="1" dirty="0">
-                <a:solidFill>
-                  <a:srgbClr val="F2F0EA"/>
-                </a:solidFill>
-                <a:latin typeface="Arial" pitchFamily="34" charset="0"/>
-                <a:ea typeface="Arial" pitchFamily="34" charset="-122"/>
-                <a:cs typeface="Arial" pitchFamily="34" charset="-120"/>
-              </a:rPr>
-              <a:t>3</a:t>
-            </a:r>
-            <a:endParaRPr lang="en-US" sz="1300" dirty="0"/>
-          </a:p>
-        </p:txBody>
-      </p:sp>
-      <p:sp>
-        <p:nvSpPr>
-          <p:cNvPr id="19" name="Text 16"/>
-          <p:cNvSpPr/>
-          <p:nvPr/>
-        </p:nvSpPr>
-        <p:spPr>
-          <a:xfrm>
-            <a:off x="1417320" y="4900676"/>
-            <a:ext cx="9174175" cy="1223772"/>
-          </a:xfrm>
-          <a:prstGeom prst="rect">
-            <a:avLst/>
-          </a:prstGeom>
-          <a:noFill/>
-          <a:ln/>
-        </p:spPr>
-        <p:txBody>
-          <a:bodyPr wrap="square" lIns="0" tIns="0" rIns="0" bIns="0" rtlCol="0" anchor="t">
-            <a:normAutofit/>
-          </a:bodyPr>
-          <a:lstStyle/>
-          <a:p>
-            <a:pPr indent="0" marL="0">
-              <a:lnSpc>
-                <a:spcPct val="105000"/>
-              </a:lnSpc>
-              <a:buNone/>
-            </a:pPr>
-            <a:r>
-              <a:rPr lang="en-US" sz="2200" dirty="0">
-                <a:solidFill>
-                  <a:srgbClr val="F2F0EA"/>
-                </a:solidFill>
-                <a:latin typeface="Arial" pitchFamily="34" charset="0"/>
-                <a:ea typeface="Arial" pitchFamily="34" charset="-122"/>
-                <a:cs typeface="Arial" pitchFamily="34" charset="-120"/>
-              </a:rPr>
-              <a:t>Ficas a distinguir o tempo histórico do tempo da narrativa e a desmontar o título, com uma pergunta no fim: quem constrói um monumento, quem o manda fazer ou quem o faz?</a:t>
-            </a:r>
-            <a:endParaRPr lang="en-US" sz="2200" dirty="0"/>
+              <a:buNone/>
+            </a:pPr>
+            <a:r>
+              <a:rPr lang="en-US" sz="1200" dirty="0">
+                <a:solidFill>
+                  <a:srgbClr val="A9A79F"/>
+                </a:solidFill>
+                <a:latin typeface="Arial" pitchFamily="34" charset="0"/>
+                <a:ea typeface="Arial" pitchFamily="34" charset="-122"/>
+                <a:cs typeface="Arial" pitchFamily="34" charset="-120"/>
+              </a:rPr>
+              <a:t>José Saramago, Memorial do Convento (1982), capítulo XXI. grafia da edição. Excerto para estudo.</a:t>
+            </a:r>
+            <a:endParaRPr lang="en-US" sz="1200" dirty="0"/>
           </a:p>
         </p:txBody>
       </p:sp>
@@ -5030,7 +4721,7 @@
             <a:off x="822960" y="502920"/>
             <a:ext cx="201168" cy="201168"/>
           </a:xfrm>
-          <a:prstGeom prst="rect">
+          <a:prstGeom prst="ellipse">
             <a:avLst/>
           </a:prstGeom>
           <a:ln w="19050">
@@ -5074,7 +4765,7 @@
                 <a:ea typeface="Arial" pitchFamily="34" charset="-122"/>
                 <a:cs typeface="Arial" pitchFamily="34" charset="-120"/>
               </a:rPr>
-              <a:t>VER, E COMPLETAR NO CADERNO</a:t>
+              <a:t>O ESSENCIAL</a:t>
             </a:r>
             <a:endParaRPr lang="en-US" sz="1100" dirty="0"/>
           </a:p>
@@ -5115,7 +4806,7 @@
                 <a:ea typeface="Arial" pitchFamily="34" charset="-122"/>
                 <a:cs typeface="Arial" pitchFamily="34" charset="-120"/>
               </a:rPr>
-              <a:t>Completa no caderno</a:t>
+              <a:t>Três coisas a fixar</a:t>
             </a:r>
             <a:endParaRPr lang="en-US" sz="3400" dirty="0"/>
           </a:p>
@@ -5146,9 +4837,632 @@
           </a:ln>
         </p:spPr>
       </p:sp>
+      <p:sp>
+        <p:nvSpPr>
+          <p:cNvPr id="10" name="Shape 7"/>
+          <p:cNvSpPr/>
+          <p:nvPr/>
+        </p:nvSpPr>
+        <p:spPr>
+          <a:xfrm>
+            <a:off x="1005840" y="2286000"/>
+            <a:ext cx="0" cy="2788412"/>
+          </a:xfrm>
+          <a:prstGeom prst="line">
+            <a:avLst/>
+          </a:prstGeom>
+          <a:noFill/>
+          <a:ln w="12700">
+            <a:solidFill>
+              <a:srgbClr val="A9A79F"/>
+            </a:solidFill>
+            <a:prstDash val="solid"/>
+          </a:ln>
+        </p:spPr>
+      </p:sp>
+      <p:sp>
+        <p:nvSpPr>
+          <p:cNvPr id="11" name="Shape 8"/>
+          <p:cNvSpPr/>
+          <p:nvPr/>
+        </p:nvSpPr>
+        <p:spPr>
+          <a:xfrm>
+            <a:off x="822960" y="2103120"/>
+            <a:ext cx="365760" cy="365760"/>
+          </a:xfrm>
+          <a:prstGeom prst="ellipse">
+            <a:avLst/>
+          </a:prstGeom>
+          <a:solidFill>
+            <a:srgbClr val="111111"/>
+          </a:solidFill>
+          <a:ln w="15875">
+            <a:solidFill>
+              <a:srgbClr val="F2F0EA"/>
+            </a:solidFill>
+            <a:prstDash val="solid"/>
+          </a:ln>
+        </p:spPr>
+      </p:sp>
+      <p:sp>
+        <p:nvSpPr>
+          <p:cNvPr id="12" name="Text 9"/>
+          <p:cNvSpPr/>
+          <p:nvPr/>
+        </p:nvSpPr>
+        <p:spPr>
+          <a:xfrm>
+            <a:off x="822960" y="2103120"/>
+            <a:ext cx="365760" cy="365760"/>
+          </a:xfrm>
+          <a:prstGeom prst="rect">
+            <a:avLst/>
+          </a:prstGeom>
+          <a:noFill/>
+          <a:ln/>
+        </p:spPr>
+        <p:txBody>
+          <a:bodyPr wrap="square" lIns="0" tIns="0" rIns="0" bIns="0" rtlCol="0" anchor="ctr"/>
+          <a:lstStyle/>
+          <a:p>
+            <a:pPr algn="ctr" indent="0" marL="0">
+              <a:buNone/>
+            </a:pPr>
+            <a:r>
+              <a:rPr lang="en-US" sz="1300" b="1" dirty="0">
+                <a:solidFill>
+                  <a:srgbClr val="F2F0EA"/>
+                </a:solidFill>
+                <a:latin typeface="Arial" pitchFamily="34" charset="0"/>
+                <a:ea typeface="Arial" pitchFamily="34" charset="-122"/>
+                <a:cs typeface="Arial" pitchFamily="34" charset="-120"/>
+              </a:rPr>
+              <a:t>1</a:t>
+            </a:r>
+            <a:endParaRPr lang="en-US" sz="1300" dirty="0"/>
+          </a:p>
+        </p:txBody>
+      </p:sp>
+      <p:sp>
+        <p:nvSpPr>
+          <p:cNvPr id="13" name="Text 10"/>
+          <p:cNvSpPr/>
+          <p:nvPr/>
+        </p:nvSpPr>
+        <p:spPr>
+          <a:xfrm>
+            <a:off x="1417320" y="2112264"/>
+            <a:ext cx="9174175" cy="1223772"/>
+          </a:xfrm>
+          <a:prstGeom prst="rect">
+            <a:avLst/>
+          </a:prstGeom>
+          <a:noFill/>
+          <a:ln/>
+        </p:spPr>
+        <p:txBody>
+          <a:bodyPr wrap="square" lIns="0" tIns="0" rIns="0" bIns="0" rtlCol="0" anchor="t">
+            <a:normAutofit/>
+          </a:bodyPr>
+          <a:lstStyle/>
+          <a:p>
+            <a:pPr indent="0" marL="0">
+              <a:lnSpc>
+                <a:spcPct val="105000"/>
+              </a:lnSpc>
+              <a:buNone/>
+            </a:pPr>
+            <a:r>
+              <a:rPr lang="en-US" sz="2200" dirty="0">
+                <a:solidFill>
+                  <a:srgbClr val="F2F0EA"/>
+                </a:solidFill>
+                <a:latin typeface="Arial" pitchFamily="34" charset="0"/>
+                <a:ea typeface="Arial" pitchFamily="34" charset="-122"/>
+                <a:cs typeface="Arial" pitchFamily="34" charset="-120"/>
+              </a:rPr>
+              <a:t>Memorial do Convento, publicado em outubro de 1982, passa-se no início do século XVIII, no reinado de D. João V e no tempo da Inquisição.</a:t>
+            </a:r>
+            <a:endParaRPr lang="en-US" sz="2200" dirty="0"/>
+          </a:p>
+        </p:txBody>
+      </p:sp>
+      <p:sp>
+        <p:nvSpPr>
+          <p:cNvPr id="14" name="Shape 11"/>
+          <p:cNvSpPr/>
+          <p:nvPr/>
+        </p:nvSpPr>
+        <p:spPr>
+          <a:xfrm>
+            <a:off x="822960" y="3326892"/>
+            <a:ext cx="365760" cy="365760"/>
+          </a:xfrm>
+          <a:prstGeom prst="ellipse">
+            <a:avLst/>
+          </a:prstGeom>
+          <a:solidFill>
+            <a:srgbClr val="111111"/>
+          </a:solidFill>
+          <a:ln w="15875">
+            <a:solidFill>
+              <a:srgbClr val="F2F0EA"/>
+            </a:solidFill>
+            <a:prstDash val="solid"/>
+          </a:ln>
+        </p:spPr>
+      </p:sp>
+      <p:sp>
+        <p:nvSpPr>
+          <p:cNvPr id="15" name="Text 12"/>
+          <p:cNvSpPr/>
+          <p:nvPr/>
+        </p:nvSpPr>
+        <p:spPr>
+          <a:xfrm>
+            <a:off x="822960" y="3326892"/>
+            <a:ext cx="365760" cy="365760"/>
+          </a:xfrm>
+          <a:prstGeom prst="rect">
+            <a:avLst/>
+          </a:prstGeom>
+          <a:noFill/>
+          <a:ln/>
+        </p:spPr>
+        <p:txBody>
+          <a:bodyPr wrap="square" lIns="0" tIns="0" rIns="0" bIns="0" rtlCol="0" anchor="ctr"/>
+          <a:lstStyle/>
+          <a:p>
+            <a:pPr algn="ctr" indent="0" marL="0">
+              <a:buNone/>
+            </a:pPr>
+            <a:r>
+              <a:rPr lang="en-US" sz="1300" b="1" dirty="0">
+                <a:solidFill>
+                  <a:srgbClr val="F2F0EA"/>
+                </a:solidFill>
+                <a:latin typeface="Arial" pitchFamily="34" charset="0"/>
+                <a:ea typeface="Arial" pitchFamily="34" charset="-122"/>
+                <a:cs typeface="Arial" pitchFamily="34" charset="-120"/>
+              </a:rPr>
+              <a:t>2</a:t>
+            </a:r>
+            <a:endParaRPr lang="en-US" sz="1300" dirty="0"/>
+          </a:p>
+        </p:txBody>
+      </p:sp>
+      <p:sp>
+        <p:nvSpPr>
+          <p:cNvPr id="16" name="Text 13"/>
+          <p:cNvSpPr/>
+          <p:nvPr/>
+        </p:nvSpPr>
+        <p:spPr>
+          <a:xfrm>
+            <a:off x="1417320" y="3336036"/>
+            <a:ext cx="9174175" cy="1564640"/>
+          </a:xfrm>
+          <a:prstGeom prst="rect">
+            <a:avLst/>
+          </a:prstGeom>
+          <a:noFill/>
+          <a:ln/>
+        </p:spPr>
+        <p:txBody>
+          <a:bodyPr wrap="square" lIns="0" tIns="0" rIns="0" bIns="0" rtlCol="0" anchor="t">
+            <a:normAutofit/>
+          </a:bodyPr>
+          <a:lstStyle/>
+          <a:p>
+            <a:pPr indent="0" marL="0">
+              <a:lnSpc>
+                <a:spcPct val="105000"/>
+              </a:lnSpc>
+              <a:buNone/>
+            </a:pPr>
+            <a:r>
+              <a:rPr lang="en-US" sz="2200" dirty="0">
+                <a:solidFill>
+                  <a:srgbClr val="F2F0EA"/>
+                </a:solidFill>
+                <a:latin typeface="Arial" pitchFamily="34" charset="0"/>
+                <a:ea typeface="Arial" pitchFamily="34" charset="-122"/>
+                <a:cs typeface="Arial" pitchFamily="34" charset="-120"/>
+              </a:rPr>
+              <a:t>O romance cruza história e ficção em quatro linhas de ação (a construção do convento; a passarola; o amor de Baltasar e Blimunda; a corte e a Inquisição) e critica a exploração dos pobres.</a:t>
+            </a:r>
+            <a:endParaRPr lang="en-US" sz="2200" dirty="0"/>
+          </a:p>
+        </p:txBody>
+      </p:sp>
+      <p:sp>
+        <p:nvSpPr>
+          <p:cNvPr id="17" name="Shape 14"/>
+          <p:cNvSpPr/>
+          <p:nvPr/>
+        </p:nvSpPr>
+        <p:spPr>
+          <a:xfrm>
+            <a:off x="822960" y="4891532"/>
+            <a:ext cx="365760" cy="365760"/>
+          </a:xfrm>
+          <a:prstGeom prst="ellipse">
+            <a:avLst/>
+          </a:prstGeom>
+          <a:solidFill>
+            <a:srgbClr val="111111"/>
+          </a:solidFill>
+          <a:ln w="15875">
+            <a:solidFill>
+              <a:srgbClr val="F2F0EA"/>
+            </a:solidFill>
+            <a:prstDash val="solid"/>
+          </a:ln>
+        </p:spPr>
+      </p:sp>
+      <p:sp>
+        <p:nvSpPr>
+          <p:cNvPr id="18" name="Text 15"/>
+          <p:cNvSpPr/>
+          <p:nvPr/>
+        </p:nvSpPr>
+        <p:spPr>
+          <a:xfrm>
+            <a:off x="822960" y="4891532"/>
+            <a:ext cx="365760" cy="365760"/>
+          </a:xfrm>
+          <a:prstGeom prst="rect">
+            <a:avLst/>
+          </a:prstGeom>
+          <a:noFill/>
+          <a:ln/>
+        </p:spPr>
+        <p:txBody>
+          <a:bodyPr wrap="square" lIns="0" tIns="0" rIns="0" bIns="0" rtlCol="0" anchor="ctr"/>
+          <a:lstStyle/>
+          <a:p>
+            <a:pPr algn="ctr" indent="0" marL="0">
+              <a:buNone/>
+            </a:pPr>
+            <a:r>
+              <a:rPr lang="en-US" sz="1300" b="1" dirty="0">
+                <a:solidFill>
+                  <a:srgbClr val="F2F0EA"/>
+                </a:solidFill>
+                <a:latin typeface="Arial" pitchFamily="34" charset="0"/>
+                <a:ea typeface="Arial" pitchFamily="34" charset="-122"/>
+                <a:cs typeface="Arial" pitchFamily="34" charset="-120"/>
+              </a:rPr>
+              <a:t>3</a:t>
+            </a:r>
+            <a:endParaRPr lang="en-US" sz="1300" dirty="0"/>
+          </a:p>
+        </p:txBody>
+      </p:sp>
+      <p:sp>
+        <p:nvSpPr>
+          <p:cNvPr id="19" name="Text 16"/>
+          <p:cNvSpPr/>
+          <p:nvPr/>
+        </p:nvSpPr>
+        <p:spPr>
+          <a:xfrm>
+            <a:off x="1417320" y="4900676"/>
+            <a:ext cx="9174175" cy="1223772"/>
+          </a:xfrm>
+          <a:prstGeom prst="rect">
+            <a:avLst/>
+          </a:prstGeom>
+          <a:noFill/>
+          <a:ln/>
+        </p:spPr>
+        <p:txBody>
+          <a:bodyPr wrap="square" lIns="0" tIns="0" rIns="0" bIns="0" rtlCol="0" anchor="t">
+            <a:normAutofit/>
+          </a:bodyPr>
+          <a:lstStyle/>
+          <a:p>
+            <a:pPr indent="0" marL="0">
+              <a:lnSpc>
+                <a:spcPct val="105000"/>
+              </a:lnSpc>
+              <a:buNone/>
+            </a:pPr>
+            <a:r>
+              <a:rPr lang="en-US" sz="2200" dirty="0">
+                <a:solidFill>
+                  <a:srgbClr val="F2F0EA"/>
+                </a:solidFill>
+                <a:latin typeface="Arial" pitchFamily="34" charset="0"/>
+                <a:ea typeface="Arial" pitchFamily="34" charset="-122"/>
+                <a:cs typeface="Arial" pitchFamily="34" charset="-120"/>
+              </a:rPr>
+              <a:t>Ficas a distinguir o tempo histórico do tempo da narrativa e a desmontar o título, com uma pergunta no fim: quem constrói um monumento, quem o manda fazer ou quem o faz?</a:t>
+            </a:r>
+            <a:endParaRPr lang="en-US" sz="2200" dirty="0"/>
+          </a:p>
+        </p:txBody>
+      </p:sp>
+    </p:spTree>
+  </p:cSld>
+  <p:clrMapOvr>
+    <a:masterClrMapping/>
+  </p:clrMapOvr>
+</p:sld>
+</file>
+
+<file path=ppt/slides/slide7.xml><?xml version="1.0" encoding="utf-8"?>
+<p:sld xmlns:a="http://schemas.openxmlformats.org/drawingml/2006/main" xmlns:r="http://schemas.openxmlformats.org/officeDocument/2006/relationships" xmlns:p="http://schemas.openxmlformats.org/presentationml/2006/main">
+  <p:cSld name="Slide 7">
+    <p:bg>
+      <p:bgPr>
+        <a:solidFill>
+          <a:srgbClr val="111111"/>
+        </a:solidFill>
+      </p:bgPr>
+    </p:bg>
+    <p:spTree>
+      <p:nvGrpSpPr>
+        <p:cNvPr id="1" name=""/>
+        <p:cNvGrpSpPr/>
+        <p:nvPr/>
+      </p:nvGrpSpPr>
+      <p:grpSpPr>
+        <a:xfrm>
+          <a:off x="0" y="0"/>
+          <a:ext cx="0" cy="0"/>
+          <a:chOff x="0" y="0"/>
+          <a:chExt cx="0" cy="0"/>
+        </a:xfrm>
+      </p:grpSpPr>
+      <p:sp>
+        <p:nvSpPr>
+          <p:cNvPr id="3" name="Text 0"/>
+          <p:cNvSpPr/>
+          <p:nvPr/>
+        </p:nvSpPr>
+        <p:spPr>
+          <a:xfrm>
+            <a:off x="10637215" y="384048"/>
+            <a:ext cx="731520" cy="365760"/>
+          </a:xfrm>
+          <a:prstGeom prst="rect">
+            <a:avLst/>
+          </a:prstGeom>
+          <a:noFill/>
+          <a:ln/>
+        </p:spPr>
+        <p:txBody>
+          <a:bodyPr wrap="square" lIns="0" tIns="0" rIns="0" bIns="0" rtlCol="0" anchor="ctr"/>
+          <a:lstStyle/>
+          <a:p>
+            <a:pPr algn="r" indent="0" marL="0">
+              <a:buNone/>
+            </a:pPr>
+            <a:r>
+              <a:rPr lang="en-US" sz="1200" b="1" spc="300" kern="0" dirty="0">
+                <a:solidFill>
+                  <a:srgbClr val="A9A79F"/>
+                </a:solidFill>
+                <a:latin typeface="Arial" pitchFamily="34" charset="0"/>
+                <a:ea typeface="Arial" pitchFamily="34" charset="-122"/>
+                <a:cs typeface="Arial" pitchFamily="34" charset="-120"/>
+              </a:rPr>
+              <a:t>EPI</a:t>
+            </a:r>
+            <a:endParaRPr lang="en-US" sz="1200" dirty="0"/>
+          </a:p>
+        </p:txBody>
+      </p:sp>
+      <p:sp>
+        <p:nvSpPr>
+          <p:cNvPr id="4" name="Text 1"/>
+          <p:cNvSpPr/>
+          <p:nvPr/>
+        </p:nvSpPr>
+        <p:spPr>
+          <a:xfrm>
+            <a:off x="822960" y="6400800"/>
+            <a:ext cx="9631375" cy="274320"/>
+          </a:xfrm>
+          <a:prstGeom prst="rect">
+            <a:avLst/>
+          </a:prstGeom>
+          <a:noFill/>
+          <a:ln/>
+        </p:spPr>
+        <p:txBody>
+          <a:bodyPr wrap="square" lIns="0" tIns="0" rIns="0" bIns="0" rtlCol="0" anchor="ctr"/>
+          <a:lstStyle/>
+          <a:p>
+            <a:pPr indent="0" marL="0">
+              <a:buNone/>
+            </a:pPr>
+            <a:r>
+              <a:rPr lang="en-US" sz="1000" dirty="0">
+                <a:solidFill>
+                  <a:srgbClr val="A9A79F"/>
+                </a:solidFill>
+                <a:latin typeface="Arial" pitchFamily="34" charset="0"/>
+                <a:ea typeface="Arial" pitchFamily="34" charset="-122"/>
+                <a:cs typeface="Arial" pitchFamily="34" charset="-120"/>
+              </a:rPr>
+              <a:t>Lição M9-F01, Um convento, uma promessa</a:t>
+            </a:r>
+            <a:endParaRPr lang="en-US" sz="1000" dirty="0"/>
+          </a:p>
+        </p:txBody>
+      </p:sp>
+      <p:sp>
+        <p:nvSpPr>
+          <p:cNvPr id="5" name="Text 2"/>
+          <p:cNvSpPr/>
+          <p:nvPr/>
+        </p:nvSpPr>
+        <p:spPr>
+          <a:xfrm>
+            <a:off x="10637215" y="6400800"/>
+            <a:ext cx="731520" cy="274320"/>
+          </a:xfrm>
+          <a:prstGeom prst="rect">
+            <a:avLst/>
+          </a:prstGeom>
+          <a:noFill/>
+          <a:ln/>
+        </p:spPr>
+        <p:txBody>
+          <a:bodyPr wrap="square" lIns="0" tIns="0" rIns="0" bIns="0" rtlCol="0" anchor="ctr"/>
+          <a:lstStyle/>
+          <a:p>
+            <a:pPr algn="r" indent="0" marL="0">
+              <a:buNone/>
+            </a:pPr>
+            <a:r>
+              <a:rPr lang="en-US" sz="1000" dirty="0">
+                <a:solidFill>
+                  <a:srgbClr val="A9A79F"/>
+                </a:solidFill>
+                <a:latin typeface="Arial" pitchFamily="34" charset="0"/>
+                <a:ea typeface="Arial" pitchFamily="34" charset="-122"/>
+                <a:cs typeface="Arial" pitchFamily="34" charset="-120"/>
+              </a:rPr>
+              <a:t>7</a:t>
+            </a:r>
+            <a:endParaRPr lang="en-US" sz="1000" dirty="0"/>
+          </a:p>
+        </p:txBody>
+      </p:sp>
+      <p:sp>
+        <p:nvSpPr>
+          <p:cNvPr id="6" name="Shape 3"/>
+          <p:cNvSpPr/>
+          <p:nvPr/>
+        </p:nvSpPr>
+        <p:spPr>
+          <a:xfrm>
+            <a:off x="822960" y="502920"/>
+            <a:ext cx="201168" cy="201168"/>
+          </a:xfrm>
+          <a:prstGeom prst="rect">
+            <a:avLst/>
+          </a:prstGeom>
+          <a:ln w="19050">
+            <a:solidFill>
+              <a:srgbClr val="F2F0EA"/>
+            </a:solidFill>
+            <a:prstDash val="solid"/>
+          </a:ln>
+        </p:spPr>
+      </p:sp>
+      <p:sp>
+        <p:nvSpPr>
+          <p:cNvPr id="7" name="Text 4"/>
+          <p:cNvSpPr/>
+          <p:nvPr/>
+        </p:nvSpPr>
+        <p:spPr>
+          <a:xfrm>
+            <a:off x="1188720" y="457200"/>
+            <a:ext cx="9448495" cy="292608"/>
+          </a:xfrm>
+          <a:prstGeom prst="rect">
+            <a:avLst/>
+          </a:prstGeom>
+          <a:noFill/>
+          <a:ln/>
+        </p:spPr>
+        <p:txBody>
+          <a:bodyPr wrap="square" lIns="0" tIns="0" rIns="0" bIns="0" rtlCol="0" anchor="ctr"/>
+          <a:lstStyle/>
+          <a:p>
+            <a:pPr indent="0" marL="0">
+              <a:buNone/>
+            </a:pPr>
+            <a:r>
+              <a:rPr lang="en-US" sz="1100" b="1" spc="250" kern="0" dirty="0">
+                <a:solidFill>
+                  <a:srgbClr val="A9A79F"/>
+                </a:solidFill>
+                <a:latin typeface="Arial" pitchFamily="34" charset="0"/>
+                <a:ea typeface="Arial" pitchFamily="34" charset="-122"/>
+                <a:cs typeface="Arial" pitchFamily="34" charset="-120"/>
+              </a:rPr>
+              <a:t>VER, E COMPLETAR NO CADERNO</a:t>
+            </a:r>
+            <a:endParaRPr lang="en-US" sz="1100" dirty="0"/>
+          </a:p>
+        </p:txBody>
+      </p:sp>
+      <p:sp>
+        <p:nvSpPr>
+          <p:cNvPr id="8" name="Text 5"/>
+          <p:cNvSpPr/>
+          <p:nvPr/>
+        </p:nvSpPr>
+        <p:spPr>
+          <a:xfrm>
+            <a:off x="822960" y="868680"/>
+            <a:ext cx="9814255" cy="822960"/>
+          </a:xfrm>
+          <a:prstGeom prst="rect">
+            <a:avLst/>
+          </a:prstGeom>
+          <a:noFill/>
+          <a:ln/>
+        </p:spPr>
+        <p:txBody>
+          <a:bodyPr wrap="square" lIns="0" tIns="0" rIns="0" bIns="0" rtlCol="0" anchor="b">
+            <a:normAutofit/>
+          </a:bodyPr>
+          <a:lstStyle/>
+          <a:p>
+            <a:pPr indent="0" marL="0">
+              <a:buNone/>
+            </a:pPr>
+            <a:r>
+              <a:rPr lang="en-US" sz="3400" dirty="0">
+                <a:solidFill>
+                  <a:srgbClr val="F2F0EA"/>
+                </a:solidFill>
+                <a:latin typeface="Arial" pitchFamily="34" charset="0"/>
+                <a:ea typeface="Arial" pitchFamily="34" charset="-122"/>
+                <a:cs typeface="Arial" pitchFamily="34" charset="-120"/>
+              </a:rPr>
+              <a:t>Completa no caderno</a:t>
+            </a:r>
+            <a:endParaRPr lang="en-US" sz="3400" dirty="0"/>
+          </a:p>
+        </p:txBody>
+      </p:sp>
+      <p:sp>
+        <p:nvSpPr>
+          <p:cNvPr id="9" name="Shape 6"/>
+          <p:cNvSpPr/>
+          <p:nvPr/>
+        </p:nvSpPr>
+        <p:spPr>
+          <a:xfrm>
+            <a:off x="822960" y="1746504"/>
+            <a:ext cx="640080" cy="64008"/>
+          </a:xfrm>
+          <a:prstGeom prst="rect">
+            <a:avLst/>
+          </a:prstGeom>
+          <a:solidFill>
+            <a:srgbClr val="E4555C"/>
+          </a:solidFill>
+          <a:ln w="12700">
+            <a:solidFill>
+              <a:srgbClr val="E4555C"/>
+            </a:solidFill>
+            <a:prstDash val="solid"/>
+          </a:ln>
+        </p:spPr>
+      </p:sp>
       <p:graphicFrame>
         <p:nvGraphicFramePr>
-          <p:cNvPr id="7" name="Table 0"/>
+          <p:cNvPr id="8" name="Table 0"/>
           <p:cNvGraphicFramePr>
             <a:graphicFrameLocks noGrp="1"/>
           </p:cNvGraphicFramePr>
@@ -5641,326 +5955,6 @@
 </p:sld>
 </file>
 
-<file path=ppt/slides/slide7.xml><?xml version="1.0" encoding="utf-8"?>
-<p:sld xmlns:a="http://schemas.openxmlformats.org/drawingml/2006/main" xmlns:r="http://schemas.openxmlformats.org/officeDocument/2006/relationships" xmlns:p="http://schemas.openxmlformats.org/presentationml/2006/main">
-  <p:cSld name="Slide 7">
-    <p:bg>
-      <p:bgPr>
-        <a:solidFill>
-          <a:srgbClr val="111111"/>
-        </a:solidFill>
-      </p:bgPr>
-    </p:bg>
-    <p:spTree>
-      <p:nvGrpSpPr>
-        <p:cNvPr id="1" name=""/>
-        <p:cNvGrpSpPr/>
-        <p:nvPr/>
-      </p:nvGrpSpPr>
-      <p:grpSpPr>
-        <a:xfrm>
-          <a:off x="0" y="0"/>
-          <a:ext cx="0" cy="0"/>
-          <a:chOff x="0" y="0"/>
-          <a:chExt cx="0" cy="0"/>
-        </a:xfrm>
-      </p:grpSpPr>
-      <p:sp>
-        <p:nvSpPr>
-          <p:cNvPr id="3" name="Text 0"/>
-          <p:cNvSpPr/>
-          <p:nvPr/>
-        </p:nvSpPr>
-        <p:spPr>
-          <a:xfrm>
-            <a:off x="10637215" y="384048"/>
-            <a:ext cx="731520" cy="365760"/>
-          </a:xfrm>
-          <a:prstGeom prst="rect">
-            <a:avLst/>
-          </a:prstGeom>
-          <a:noFill/>
-          <a:ln/>
-        </p:spPr>
-        <p:txBody>
-          <a:bodyPr wrap="square" lIns="0" tIns="0" rIns="0" bIns="0" rtlCol="0" anchor="ctr"/>
-          <a:lstStyle/>
-          <a:p>
-            <a:pPr algn="r" indent="0" marL="0">
-              <a:buNone/>
-            </a:pPr>
-            <a:r>
-              <a:rPr lang="en-US" sz="1200" b="1" spc="300" kern="0" dirty="0">
-                <a:solidFill>
-                  <a:srgbClr val="A9A79F"/>
-                </a:solidFill>
-                <a:latin typeface="Arial" pitchFamily="34" charset="0"/>
-                <a:ea typeface="Arial" pitchFamily="34" charset="-122"/>
-                <a:cs typeface="Arial" pitchFamily="34" charset="-120"/>
-              </a:rPr>
-              <a:t>EPI</a:t>
-            </a:r>
-            <a:endParaRPr lang="en-US" sz="1200" dirty="0"/>
-          </a:p>
-        </p:txBody>
-      </p:sp>
-      <p:sp>
-        <p:nvSpPr>
-          <p:cNvPr id="4" name="Text 1"/>
-          <p:cNvSpPr/>
-          <p:nvPr/>
-        </p:nvSpPr>
-        <p:spPr>
-          <a:xfrm>
-            <a:off x="822960" y="6400800"/>
-            <a:ext cx="9631375" cy="274320"/>
-          </a:xfrm>
-          <a:prstGeom prst="rect">
-            <a:avLst/>
-          </a:prstGeom>
-          <a:noFill/>
-          <a:ln/>
-        </p:spPr>
-        <p:txBody>
-          <a:bodyPr wrap="square" lIns="0" tIns="0" rIns="0" bIns="0" rtlCol="0" anchor="ctr"/>
-          <a:lstStyle/>
-          <a:p>
-            <a:pPr indent="0" marL="0">
-              <a:buNone/>
-            </a:pPr>
-            <a:r>
-              <a:rPr lang="en-US" sz="1000" dirty="0">
-                <a:solidFill>
-                  <a:srgbClr val="A9A79F"/>
-                </a:solidFill>
-                <a:latin typeface="Arial" pitchFamily="34" charset="0"/>
-                <a:ea typeface="Arial" pitchFamily="34" charset="-122"/>
-                <a:cs typeface="Arial" pitchFamily="34" charset="-120"/>
-              </a:rPr>
-              <a:t>Lição M9-F01, Um convento, uma promessa</a:t>
-            </a:r>
-            <a:endParaRPr lang="en-US" sz="1000" dirty="0"/>
-          </a:p>
-        </p:txBody>
-      </p:sp>
-      <p:sp>
-        <p:nvSpPr>
-          <p:cNvPr id="5" name="Text 2"/>
-          <p:cNvSpPr/>
-          <p:nvPr/>
-        </p:nvSpPr>
-        <p:spPr>
-          <a:xfrm>
-            <a:off x="10637215" y="6400800"/>
-            <a:ext cx="731520" cy="274320"/>
-          </a:xfrm>
-          <a:prstGeom prst="rect">
-            <a:avLst/>
-          </a:prstGeom>
-          <a:noFill/>
-          <a:ln/>
-        </p:spPr>
-        <p:txBody>
-          <a:bodyPr wrap="square" lIns="0" tIns="0" rIns="0" bIns="0" rtlCol="0" anchor="ctr"/>
-          <a:lstStyle/>
-          <a:p>
-            <a:pPr algn="r" indent="0" marL="0">
-              <a:buNone/>
-            </a:pPr>
-            <a:r>
-              <a:rPr lang="en-US" sz="1000" dirty="0">
-                <a:solidFill>
-                  <a:srgbClr val="A9A79F"/>
-                </a:solidFill>
-                <a:latin typeface="Arial" pitchFamily="34" charset="0"/>
-                <a:ea typeface="Arial" pitchFamily="34" charset="-122"/>
-                <a:cs typeface="Arial" pitchFamily="34" charset="-120"/>
-              </a:rPr>
-              <a:t>7</a:t>
-            </a:r>
-            <a:endParaRPr lang="en-US" sz="1000" dirty="0"/>
-          </a:p>
-        </p:txBody>
-      </p:sp>
-      <p:sp>
-        <p:nvSpPr>
-          <p:cNvPr id="6" name="Shape 3"/>
-          <p:cNvSpPr/>
-          <p:nvPr/>
-        </p:nvSpPr>
-        <p:spPr>
-          <a:xfrm>
-            <a:off x="822960" y="502920"/>
-            <a:ext cx="201168" cy="201168"/>
-          </a:xfrm>
-          <a:prstGeom prst="ellipse">
-            <a:avLst/>
-          </a:prstGeom>
-          <a:ln w="19050">
-            <a:solidFill>
-              <a:srgbClr val="F2F0EA"/>
-            </a:solidFill>
-            <a:prstDash val="solid"/>
-          </a:ln>
-        </p:spPr>
-      </p:sp>
-      <p:sp>
-        <p:nvSpPr>
-          <p:cNvPr id="7" name="Text 4"/>
-          <p:cNvSpPr/>
-          <p:nvPr/>
-        </p:nvSpPr>
-        <p:spPr>
-          <a:xfrm>
-            <a:off x="1188720" y="457200"/>
-            <a:ext cx="9448495" cy="292608"/>
-          </a:xfrm>
-          <a:prstGeom prst="rect">
-            <a:avLst/>
-          </a:prstGeom>
-          <a:noFill/>
-          <a:ln/>
-        </p:spPr>
-        <p:txBody>
-          <a:bodyPr wrap="square" lIns="0" tIns="0" rIns="0" bIns="0" rtlCol="0" anchor="ctr"/>
-          <a:lstStyle/>
-          <a:p>
-            <a:pPr indent="0" marL="0">
-              <a:buNone/>
-            </a:pPr>
-            <a:r>
-              <a:rPr lang="en-US" sz="1100" b="1" spc="250" kern="0" dirty="0">
-                <a:solidFill>
-                  <a:srgbClr val="A9A79F"/>
-                </a:solidFill>
-                <a:latin typeface="Arial" pitchFamily="34" charset="0"/>
-                <a:ea typeface="Arial" pitchFamily="34" charset="-122"/>
-                <a:cs typeface="Arial" pitchFamily="34" charset="-120"/>
-              </a:rPr>
-              <a:t>VER</a:t>
-            </a:r>
-            <a:endParaRPr lang="en-US" sz="1100" dirty="0"/>
-          </a:p>
-        </p:txBody>
-      </p:sp>
-      <p:sp>
-        <p:nvSpPr>
-          <p:cNvPr id="8" name="Text 5"/>
-          <p:cNvSpPr/>
-          <p:nvPr/>
-        </p:nvSpPr>
-        <p:spPr>
-          <a:xfrm>
-            <a:off x="822960" y="868680"/>
-            <a:ext cx="9814255" cy="822960"/>
-          </a:xfrm>
-          <a:prstGeom prst="rect">
-            <a:avLst/>
-          </a:prstGeom>
-          <a:noFill/>
-          <a:ln/>
-        </p:spPr>
-        <p:txBody>
-          <a:bodyPr wrap="square" lIns="0" tIns="0" rIns="0" bIns="0" rtlCol="0" anchor="b">
-            <a:normAutofit/>
-          </a:bodyPr>
-          <a:lstStyle/>
-          <a:p>
-            <a:pPr indent="0" marL="0">
-              <a:buNone/>
-            </a:pPr>
-            <a:r>
-              <a:rPr lang="en-US" sz="3400" dirty="0">
-                <a:solidFill>
-                  <a:srgbClr val="F2F0EA"/>
-                </a:solidFill>
-                <a:latin typeface="Arial" pitchFamily="34" charset="0"/>
-                <a:ea typeface="Arial" pitchFamily="34" charset="-122"/>
-                <a:cs typeface="Arial" pitchFamily="34" charset="-120"/>
-              </a:rPr>
-              <a:t>O romance</a:t>
-            </a:r>
-            <a:endParaRPr lang="en-US" sz="3400" dirty="0"/>
-          </a:p>
-        </p:txBody>
-      </p:sp>
-      <p:sp>
-        <p:nvSpPr>
-          <p:cNvPr id="9" name="Shape 6"/>
-          <p:cNvSpPr/>
-          <p:nvPr/>
-        </p:nvSpPr>
-        <p:spPr>
-          <a:xfrm>
-            <a:off x="822960" y="1746504"/>
-            <a:ext cx="640080" cy="64008"/>
-          </a:xfrm>
-          <a:prstGeom prst="rect">
-            <a:avLst/>
-          </a:prstGeom>
-          <a:solidFill>
-            <a:srgbClr val="E4555C"/>
-          </a:solidFill>
-          <a:ln w="12700">
-            <a:solidFill>
-              <a:srgbClr val="E4555C"/>
-            </a:solidFill>
-            <a:prstDash val="solid"/>
-          </a:ln>
-        </p:spPr>
-      </p:sp>
-      <p:sp>
-        <p:nvSpPr>
-          <p:cNvPr id="10" name="Text 7"/>
-          <p:cNvSpPr/>
-          <p:nvPr/>
-        </p:nvSpPr>
-        <p:spPr>
-          <a:xfrm>
-            <a:off x="822960" y="2011680"/>
-            <a:ext cx="9814255" cy="4023360"/>
-          </a:xfrm>
-          <a:prstGeom prst="rect">
-            <a:avLst/>
-          </a:prstGeom>
-          <a:noFill/>
-          <a:ln/>
-        </p:spPr>
-        <p:txBody>
-          <a:bodyPr wrap="square" lIns="0" tIns="0" rIns="0" bIns="0" rtlCol="0" anchor="t">
-            <a:normAutofit/>
-          </a:bodyPr>
-          <a:lstStyle/>
-          <a:p>
-            <a:pPr indent="0" marL="0">
-              <a:lnSpc>
-                <a:spcPct val="120000"/>
-              </a:lnSpc>
-              <a:buNone/>
-            </a:pPr>
-            <a:r>
-              <a:rPr lang="en-US" sz="2300" dirty="0">
-                <a:solidFill>
-                  <a:srgbClr val="F2F0EA"/>
-                </a:solidFill>
-                <a:latin typeface="Georgia" pitchFamily="34" charset="0"/>
-                <a:ea typeface="Georgia" pitchFamily="34" charset="-122"/>
-                <a:cs typeface="Georgia" pitchFamily="34" charset="-120"/>
-              </a:rPr>
-              <a:t>Publicado em outubro de 1982, o Memorial do Convento passa-se no início do século XVIII, no reinado de D. João V e no tempo da Inquisição. O rei manda construir o Convento de Mafra para cumprir uma promessa ligada à sucessão do trono, com o ouro e os diamantes do Brasil. O romance cruza ficção e história e critica a exploração dos pobres pelos poderosos.</a:t>
-            </a:r>
-            <a:endParaRPr lang="en-US" sz="2300" dirty="0"/>
-          </a:p>
-        </p:txBody>
-      </p:sp>
-    </p:spTree>
-  </p:cSld>
-  <p:clrMapOvr>
-    <a:masterClrMapping/>
-  </p:clrMapOvr>
-</p:sld>
-</file>
-
 <file path=ppt/slides/slide8.xml><?xml version="1.0" encoding="utf-8"?>
 <p:sld xmlns:a="http://schemas.openxmlformats.org/drawingml/2006/main" xmlns:r="http://schemas.openxmlformats.org/officeDocument/2006/relationships" xmlns:p="http://schemas.openxmlformats.org/presentationml/2006/main">
   <p:cSld name="Slide 8">

--- a/m9/diapositivos/sessao-01-m9-f01.pptx
+++ b/m9/diapositivos/sessao-01-m9-f01.pptx
@@ -4215,7 +4215,35 @@
                 <a:ea typeface="Arial" pitchFamily="34" charset="-122"/>
                 <a:cs typeface="Arial" pitchFamily="34" charset="-120"/>
               </a:rPr>
-              <a:t>José Saramago, Memorial do Convento (1982), capítulo XXI. grafia da edição. Excerto para estudo.</a:t>
+              <a:t>José Saramago, </a:t>
+            </a:r>
+            <a:pPr indent="0" marL="0">
+              <a:buNone/>
+            </a:pPr>
+            <a:r>
+              <a:rPr lang="en-US" sz="1200" i="1" dirty="0">
+                <a:solidFill>
+                  <a:srgbClr val="A9A79F"/>
+                </a:solidFill>
+                <a:latin typeface="Arial" pitchFamily="34" charset="0"/>
+                <a:ea typeface="Arial" pitchFamily="34" charset="-122"/>
+                <a:cs typeface="Arial" pitchFamily="34" charset="-120"/>
+              </a:rPr>
+              <a:t>Memorial do Convento</a:t>
+            </a:r>
+            <a:pPr indent="0" marL="0">
+              <a:buNone/>
+            </a:pPr>
+            <a:r>
+              <a:rPr lang="en-US" sz="1200" dirty="0">
+                <a:solidFill>
+                  <a:srgbClr val="A9A79F"/>
+                </a:solidFill>
+                <a:latin typeface="Arial" pitchFamily="34" charset="0"/>
+                <a:ea typeface="Arial" pitchFamily="34" charset="-122"/>
+                <a:cs typeface="Arial" pitchFamily="34" charset="-120"/>
+              </a:rPr>
+              <a:t> (1982), capítulo XXI. grafia da edição. Excerto para estudo.</a:t>
             </a:r>
             <a:endParaRPr lang="en-US" sz="1200" dirty="0"/>
           </a:p>
@@ -4555,7 +4583,35 @@
                 <a:ea typeface="Arial" pitchFamily="34" charset="-122"/>
                 <a:cs typeface="Arial" pitchFamily="34" charset="-120"/>
               </a:rPr>
-              <a:t>José Saramago, Memorial do Convento (1982), capítulo XXI. grafia da edição. Excerto para estudo.</a:t>
+              <a:t>José Saramago, </a:t>
+            </a:r>
+            <a:pPr indent="0" marL="0">
+              <a:buNone/>
+            </a:pPr>
+            <a:r>
+              <a:rPr lang="en-US" sz="1200" i="1" dirty="0">
+                <a:solidFill>
+                  <a:srgbClr val="A9A79F"/>
+                </a:solidFill>
+                <a:latin typeface="Arial" pitchFamily="34" charset="0"/>
+                <a:ea typeface="Arial" pitchFamily="34" charset="-122"/>
+                <a:cs typeface="Arial" pitchFamily="34" charset="-120"/>
+              </a:rPr>
+              <a:t>Memorial do Convento</a:t>
+            </a:r>
+            <a:pPr indent="0" marL="0">
+              <a:buNone/>
+            </a:pPr>
+            <a:r>
+              <a:rPr lang="en-US" sz="1200" dirty="0">
+                <a:solidFill>
+                  <a:srgbClr val="A9A79F"/>
+                </a:solidFill>
+                <a:latin typeface="Arial" pitchFamily="34" charset="0"/>
+                <a:ea typeface="Arial" pitchFamily="34" charset="-122"/>
+                <a:cs typeface="Arial" pitchFamily="34" charset="-120"/>
+              </a:rPr>
+              <a:t> (1982), capítulo XXI. grafia da edição. Excerto para estudo.</a:t>
             </a:r>
             <a:endParaRPr lang="en-US" sz="1200" dirty="0"/>
           </a:p>
@@ -4954,6 +5010,23 @@
               <a:buNone/>
             </a:pPr>
             <a:r>
+              <a:rPr lang="en-US" sz="2200" i="1" dirty="0">
+                <a:solidFill>
+                  <a:srgbClr val="F2F0EA"/>
+                </a:solidFill>
+                <a:latin typeface="Arial" pitchFamily="34" charset="0"/>
+                <a:ea typeface="Arial" pitchFamily="34" charset="-122"/>
+                <a:cs typeface="Arial" pitchFamily="34" charset="-120"/>
+              </a:rPr>
+              <a:t>Memorial do Convento</a:t>
+            </a:r>
+            <a:pPr indent="0" marL="0">
+              <a:lnSpc>
+                <a:spcPct val="105000"/>
+              </a:lnSpc>
+              <a:buNone/>
+            </a:pPr>
+            <a:r>
               <a:rPr lang="en-US" sz="2200" dirty="0">
                 <a:solidFill>
                   <a:srgbClr val="F2F0EA"/>
@@ -4962,7 +5035,7 @@
                 <a:ea typeface="Arial" pitchFamily="34" charset="-122"/>
                 <a:cs typeface="Arial" pitchFamily="34" charset="-120"/>
               </a:rPr>
-              <a:t>Memorial do Convento, publicado em outubro de 1982, passa-se no início do século XVIII, no reinado de D. João V e no tempo da Inquisição.</a:t>
+              <a:t>, publicado em outubro de 1982, passa-se no início do século XVIII, no reinado de D. João V e no tempo da Inquisição.</a:t>
             </a:r>
             <a:endParaRPr lang="en-US" sz="2200" dirty="0"/>
           </a:p>
